--- a/assets/figures-editable/c1-c2/c2-e28.pptx
+++ b/assets/figures-editable/c1-c2/c2-e28.pptx
@@ -7,7 +7,7 @@
   <p:sldIdLst>
     <p:sldId id="256" r:id="rId7"/>
   </p:sldIdLst>
-  <p:sldSz cx="11948160" cy="8095488" type="screen4x3"/>
+  <p:sldSz cx="12191695" cy="6858000" type="screen4x3"/>
   <p:notesSz cx="6858000" cy="9144000"/>
   <p:defaultTextStyle>
     <a:defPPr>
@@ -3098,14 +3098,14 @@
       <p:grpSpPr/>
       <p:sp>
         <p:nvSpPr>
-          <p:cNvPr id="2" name="text1" descr="sci-ppt:C2-E28-001"/>
+          <p:cNvPr id="2" name="C2-E28 text 0" descr="sci-ppt:o000"/>
           <p:cNvSpPr txBox="1"/>
           <p:nvPr/>
         </p:nvSpPr>
         <p:spPr>
           <a:xfrm>
-            <a:off x="316992" y="268224"/>
-            <a:ext cx="11277600" cy="359054"/>
+            <a:off x="274320" y="118872"/>
+            <a:ext cx="11612880" cy="340105"/>
           </a:xfrm>
           <a:prstGeom prst="rect">
             <a:avLst/>
@@ -3114,7 +3114,7 @@
           <a:effectLst/>
         </p:spPr>
         <p:txBody>
-          <a:bodyPr wrap="none" lIns="27432" rIns="27432" tIns="18288" bIns="18288" anchor="ctr">
+          <a:bodyPr wrap="none" lIns="18288" rIns="18288" tIns="18288" bIns="18288" anchor="t">
             <a:spAutoFit/>
           </a:bodyPr>
           <a:lstStyle/>
@@ -3125,35 +3125,375 @@
               </a:spcAft>
             </a:pPr>
             <a:r>
-              <a:rPr sz="1823" b="0" i="0">
+              <a:rPr sz="1900" b="1" i="0">
                 <a:solidFill>
                   <a:srgbClr val="8EDBD4"/>
                 </a:solidFill>
                 <a:latin typeface="Arial"/>
               </a:rPr>
-              <a:t>C2-E28 | Physical-variable diagram</a:t>
-            </a:r>
-          </a:p>
-        </p:txBody>
-      </p:sp>
-      <p:sp>
-        <p:nvSpPr>
-          <p:cNvPr id="3" name="rect2" descr="sci-ppt:C2-E28-002"/>
+              <a:t>C2-E28 · Declared preparation-path enthalpy estimate</a:t>
+            </a:r>
+          </a:p>
+        </p:txBody>
+      </p:sp>
+      <p:sp>
+        <p:nvSpPr>
+          <p:cNvPr id="3" name="C2-E28 round_rect 1" descr="sci-ppt:o001"/>
           <p:cNvSpPr/>
           <p:nvPr/>
         </p:nvSpPr>
         <p:spPr>
           <a:xfrm>
-            <a:off x="914400" y="1828800"/>
-            <a:ext cx="3048000" cy="1219200"/>
-          </a:xfrm>
-          <a:prstGeom prst="rect">
+            <a:off x="365760" y="914400"/>
+            <a:ext cx="5486400" cy="4937760"/>
+          </a:xfrm>
+          <a:prstGeom prst="roundRect">
             <a:avLst/>
           </a:prstGeom>
           <a:solidFill>
             <a:srgbClr val="213E4B"/>
           </a:solidFill>
+          <a:ln w="20320">
+            <a:solidFill>
+              <a:srgbClr val="8EDBD4"/>
+            </a:solidFill>
+          </a:ln>
+          <a:effectLst/>
+        </p:spPr>
+        <p:txBody>
+          <a:bodyPr rtlCol="0" anchor="ctr"/>
+          <a:lstStyle/>
+          <a:p>
+            <a:pPr algn="ctr"/>
+          </a:p>
+        </p:txBody>
+      </p:sp>
+      <p:sp>
+        <p:nvSpPr>
+          <p:cNvPr id="4" name="C2-E28 text 2" descr="sci-ppt:o002"/>
+          <p:cNvSpPr txBox="1"/>
+          <p:nvPr/>
+        </p:nvSpPr>
+        <p:spPr>
+          <a:xfrm>
+            <a:off x="475488" y="969264"/>
+            <a:ext cx="5266944" cy="254889"/>
+          </a:xfrm>
+          <a:prstGeom prst="rect">
+            <a:avLst/>
+          </a:prstGeom>
+          <a:noFill/>
+          <a:effectLst/>
+        </p:spPr>
+        <p:txBody>
+          <a:bodyPr wrap="none" lIns="18288" rIns="18288" tIns="18288" bIns="18288" anchor="t">
+            <a:spAutoFit/>
+          </a:bodyPr>
+          <a:lstStyle/>
+          <a:p>
+            <a:pPr algn="l">
+              <a:spcAft>
+                <a:spcPts val="0"/>
+              </a:spcAft>
+            </a:pPr>
+            <a:r>
+              <a:rPr sz="1350" b="1" i="0">
+                <a:solidFill>
+                  <a:srgbClr val="8EDBD4"/>
+                </a:solidFill>
+                <a:latin typeface="Arial"/>
+              </a:rPr>
+              <a:t>Enthalpy path (schematic)</a:t>
+            </a:r>
+          </a:p>
+        </p:txBody>
+      </p:sp>
+      <p:cxnSp>
+        <p:nvCxnSpPr>
+          <p:cNvPr id="5" name="C2-E28 arrow 3" descr="sci-ppt:o003"/>
+          <p:cNvCxnSpPr/>
+          <p:nvPr/>
+        </p:nvCxnSpPr>
+        <p:spPr>
+          <a:xfrm flipV="1">
+            <a:off x="914400" y="1645920"/>
+            <a:ext cx="0" cy="3383280"/>
+          </a:xfrm>
+          <a:prstGeom prst="line">
+            <a:avLst/>
+          </a:prstGeom>
           <a:ln w="19050">
+            <a:solidFill>
+              <a:srgbClr val="B4C7D2"/>
+            </a:solidFill>
+            <a:headEnd type="none" w="med" len="med"/>
+            <a:tailEnd type="triangle" w="med" len="med"/>
+          </a:ln>
+          <a:effectLst/>
+        </p:spPr>
+      </p:cxnSp>
+      <p:cxnSp>
+        <p:nvCxnSpPr>
+          <p:cNvPr id="6" name="C2-E28 arrow 4" descr="sci-ppt:o004"/>
+          <p:cNvCxnSpPr/>
+          <p:nvPr/>
+        </p:nvCxnSpPr>
+        <p:spPr>
+          <a:xfrm>
+            <a:off x="914400" y="5029200"/>
+            <a:ext cx="4572000" cy="0"/>
+          </a:xfrm>
+          <a:prstGeom prst="line">
+            <a:avLst/>
+          </a:prstGeom>
+          <a:ln w="19050">
+            <a:solidFill>
+              <a:srgbClr val="B4C7D2"/>
+            </a:solidFill>
+            <a:headEnd type="none" w="med" len="med"/>
+            <a:tailEnd type="triangle" w="med" len="med"/>
+          </a:ln>
+          <a:effectLst/>
+        </p:spPr>
+      </p:cxnSp>
+      <p:sp>
+        <p:nvSpPr>
+          <p:cNvPr id="7" name="C2-E28 text 5" descr="sci-ppt:o005"/>
+          <p:cNvSpPr txBox="1"/>
+          <p:nvPr/>
+        </p:nvSpPr>
+        <p:spPr>
+          <a:xfrm>
+            <a:off x="1005840" y="1463040"/>
+            <a:ext cx="1828800" cy="223900"/>
+          </a:xfrm>
+          <a:prstGeom prst="rect">
+            <a:avLst/>
+          </a:prstGeom>
+          <a:noFill/>
+          <a:effectLst/>
+        </p:spPr>
+        <p:txBody>
+          <a:bodyPr wrap="none" lIns="18288" rIns="18288" tIns="18288" bIns="18288" anchor="t">
+            <a:spAutoFit/>
+          </a:bodyPr>
+          <a:lstStyle/>
+          <a:p>
+            <a:pPr algn="l">
+              <a:spcAft>
+                <a:spcPts val="0"/>
+              </a:spcAft>
+            </a:pPr>
+            <a:r>
+              <a:rPr sz="1150" b="0" i="0">
+                <a:solidFill>
+                  <a:srgbClr val="B4C7D2"/>
+                </a:solidFill>
+                <a:latin typeface="Arial"/>
+              </a:rPr>
+              <a:t>enthalpy H</a:t>
+            </a:r>
+          </a:p>
+        </p:txBody>
+      </p:sp>
+      <p:sp>
+        <p:nvSpPr>
+          <p:cNvPr id="8" name="C2-E28 text 6" descr="sci-ppt:o006"/>
+          <p:cNvSpPr txBox="1"/>
+          <p:nvPr/>
+        </p:nvSpPr>
+        <p:spPr>
+          <a:xfrm>
+            <a:off x="4572000" y="5074920"/>
+            <a:ext cx="1371600" cy="231648"/>
+          </a:xfrm>
+          <a:prstGeom prst="rect">
+            <a:avLst/>
+          </a:prstGeom>
+          <a:noFill/>
+          <a:effectLst/>
+        </p:spPr>
+        <p:txBody>
+          <a:bodyPr wrap="none" lIns="18288" rIns="18288" tIns="18288" bIns="18288" anchor="t">
+            <a:spAutoFit/>
+          </a:bodyPr>
+          <a:lstStyle/>
+          <a:p>
+            <a:pPr algn="l">
+              <a:spcAft>
+                <a:spcPts val="0"/>
+              </a:spcAft>
+            </a:pPr>
+            <a:r>
+              <a:rPr sz="1200" b="0" i="0">
+                <a:solidFill>
+                  <a:srgbClr val="B4C7D2"/>
+                </a:solidFill>
+                <a:latin typeface="Arial"/>
+              </a:rPr>
+              <a:t>T</a:t>
+            </a:r>
+          </a:p>
+        </p:txBody>
+      </p:sp>
+      <p:cxnSp>
+        <p:nvCxnSpPr>
+          <p:cNvPr id="9" name="C2-E28 line 7" descr="sci-ppt:o007"/>
+          <p:cNvCxnSpPr/>
+          <p:nvPr/>
+        </p:nvCxnSpPr>
+        <p:spPr>
+          <a:xfrm flipV="1">
+            <a:off x="1280160" y="3931920"/>
+            <a:ext cx="1828800" cy="640080"/>
+          </a:xfrm>
+          <a:prstGeom prst="line">
+            <a:avLst/>
+          </a:prstGeom>
+          <a:ln w="50800">
+            <a:solidFill>
+              <a:srgbClr val="7FC8F8"/>
+            </a:solidFill>
+          </a:ln>
+          <a:effectLst/>
+        </p:spPr>
+      </p:cxnSp>
+      <p:cxnSp>
+        <p:nvCxnSpPr>
+          <p:cNvPr id="10" name="C2-E28 line 8" descr="sci-ppt:o008"/>
+          <p:cNvCxnSpPr/>
+          <p:nvPr/>
+        </p:nvCxnSpPr>
+        <p:spPr>
+          <a:xfrm flipV="1">
+            <a:off x="3108960" y="2468880"/>
+            <a:ext cx="0" cy="1463040"/>
+          </a:xfrm>
+          <a:prstGeom prst="line">
+            <a:avLst/>
+          </a:prstGeom>
+          <a:ln w="50800">
+            <a:solidFill>
+              <a:srgbClr val="F28BA0"/>
+            </a:solidFill>
+          </a:ln>
+          <a:effectLst/>
+        </p:spPr>
+      </p:cxnSp>
+      <p:sp>
+        <p:nvSpPr>
+          <p:cNvPr id="11" name="C2-E28 text 9" descr="sci-ppt:o009"/>
+          <p:cNvSpPr txBox="1"/>
+          <p:nvPr/>
+        </p:nvSpPr>
+        <p:spPr>
+          <a:xfrm>
+            <a:off x="1371600" y="4480560"/>
+            <a:ext cx="2194560" cy="402081"/>
+          </a:xfrm>
+          <a:prstGeom prst="rect">
+            <a:avLst/>
+          </a:prstGeom>
+          <a:noFill/>
+          <a:effectLst/>
+        </p:spPr>
+        <p:txBody>
+          <a:bodyPr wrap="none" lIns="18288" rIns="18288" tIns="18288" bIns="18288" anchor="t">
+            <a:spAutoFit/>
+          </a:bodyPr>
+          <a:lstStyle/>
+          <a:p>
+            <a:pPr algn="l">
+              <a:spcAft>
+                <a:spcPts val="0"/>
+              </a:spcAft>
+            </a:pPr>
+            <a:r>
+              <a:rPr sz="1150" b="1" i="0">
+                <a:solidFill>
+                  <a:srgbClr val="7FC8F8"/>
+                </a:solidFill>
+                <a:latin typeface="Arial"/>
+              </a:rPr>
+              <a:t>sensible</a:t>
+            </a:r>
+          </a:p>
+          <a:p>
+            <a:pPr algn="l">
+              <a:spcAft>
+                <a:spcPts val="0"/>
+              </a:spcAft>
+            </a:pPr>
+            <a:r>
+              <a:rPr sz="1150" b="1" i="0">
+                <a:solidFill>
+                  <a:srgbClr val="7FC8F8"/>
+                </a:solidFill>
+                <a:latin typeface="Arial"/>
+              </a:rPr>
+              <a:t>293 → 323 K</a:t>
+            </a:r>
+          </a:p>
+        </p:txBody>
+      </p:sp>
+      <p:sp>
+        <p:nvSpPr>
+          <p:cNvPr id="12" name="C2-E28 text 10" descr="sci-ppt:o010"/>
+          <p:cNvSpPr txBox="1"/>
+          <p:nvPr/>
+        </p:nvSpPr>
+        <p:spPr>
+          <a:xfrm>
+            <a:off x="3246120" y="3017520"/>
+            <a:ext cx="2377440" cy="223900"/>
+          </a:xfrm>
+          <a:prstGeom prst="rect">
+            <a:avLst/>
+          </a:prstGeom>
+          <a:noFill/>
+          <a:effectLst/>
+        </p:spPr>
+        <p:txBody>
+          <a:bodyPr wrap="none" lIns="18288" rIns="18288" tIns="18288" bIns="18288" anchor="t">
+            <a:spAutoFit/>
+          </a:bodyPr>
+          <a:lstStyle/>
+          <a:p>
+            <a:pPr algn="l">
+              <a:spcAft>
+                <a:spcPts val="0"/>
+              </a:spcAft>
+            </a:pPr>
+            <a:r>
+              <a:rPr sz="1150" b="1" i="0">
+                <a:solidFill>
+                  <a:srgbClr val="F28BA0"/>
+                </a:solidFill>
+                <a:latin typeface="Arial"/>
+              </a:rPr>
+              <a:t>latent step Lᵥ</a:t>
+            </a:r>
+          </a:p>
+        </p:txBody>
+      </p:sp>
+      <p:sp>
+        <p:nvSpPr>
+          <p:cNvPr id="13" name="C2-E28 ellipse 11" descr="sci-ppt:o011"/>
+          <p:cNvSpPr/>
+          <p:nvPr/>
+        </p:nvSpPr>
+        <p:spPr>
+          <a:xfrm>
+            <a:off x="1216151" y="4507992"/>
+            <a:ext cx="128016" cy="128016"/>
+          </a:xfrm>
+          <a:prstGeom prst="ellipse">
+            <a:avLst/>
+          </a:prstGeom>
+          <a:solidFill>
+            <a:srgbClr val="B4C7D2"/>
+          </a:solidFill>
+          <a:ln w="12700">
             <a:solidFill>
               <a:srgbClr val="B4C7D2"/>
             </a:solidFill>
@@ -3170,14 +3510,46 @@
       </p:sp>
       <p:sp>
         <p:nvSpPr>
-          <p:cNvPr id="4" name="text3" descr="sci-ppt:C2-E28-003"/>
+          <p:cNvPr id="14" name="C2-E28 ellipse 12" descr="sci-ppt:o012"/>
+          <p:cNvSpPr/>
+          <p:nvPr/>
+        </p:nvSpPr>
+        <p:spPr>
+          <a:xfrm>
+            <a:off x="3044952" y="2404872"/>
+            <a:ext cx="128016" cy="128016"/>
+          </a:xfrm>
+          <a:prstGeom prst="ellipse">
+            <a:avLst/>
+          </a:prstGeom>
+          <a:solidFill>
+            <a:srgbClr val="B4C7D2"/>
+          </a:solidFill>
+          <a:ln w="12700">
+            <a:solidFill>
+              <a:srgbClr val="B4C7D2"/>
+            </a:solidFill>
+          </a:ln>
+          <a:effectLst/>
+        </p:spPr>
+        <p:txBody>
+          <a:bodyPr rtlCol="0" anchor="ctr"/>
+          <a:lstStyle/>
+          <a:p>
+            <a:pPr algn="ctr"/>
+          </a:p>
+        </p:txBody>
+      </p:sp>
+      <p:sp>
+        <p:nvSpPr>
+          <p:cNvPr id="15" name="C2-E28 text 13" descr="sci-ppt:o013"/>
           <p:cNvSpPr txBox="1"/>
           <p:nvPr/>
         </p:nvSpPr>
         <p:spPr>
           <a:xfrm>
-            <a:off x="1036320" y="1950720"/>
-            <a:ext cx="2865120" cy="340156"/>
+            <a:off x="502920" y="5303520"/>
+            <a:ext cx="5212080" cy="402081"/>
           </a:xfrm>
           <a:prstGeom prst="rect">
             <a:avLst/>
@@ -3186,7 +3558,7 @@
           <a:effectLst/>
         </p:spPr>
         <p:txBody>
-          <a:bodyPr wrap="none" lIns="27432" rIns="27432" tIns="18288" bIns="18288" anchor="ctr">
+          <a:bodyPr wrap="none" lIns="18288" rIns="18288" tIns="18288" bIns="18288" anchor="t">
             <a:spAutoFit/>
           </a:bodyPr>
           <a:lstStyle/>
@@ -3197,59 +3569,43 @@
               </a:spcAft>
             </a:pPr>
             <a:r>
-              <a:rPr sz="1728" b="0" i="0">
+              <a:rPr sz="1150" b="0" i="0">
                 <a:solidFill>
                   <a:srgbClr val="E7F0F3"/>
                 </a:solidFill>
                 <a:latin typeface="Arial"/>
               </a:rPr>
-              <a:t>Sensible heating</a:t>
-            </a:r>
-          </a:p>
-        </p:txBody>
-      </p:sp>
-      <p:sp>
-        <p:nvSpPr>
-          <p:cNvPr id="5" name="rect4" descr="sci-ppt:C2-E28-004"/>
-          <p:cNvSpPr/>
-          <p:nvPr/>
-        </p:nvSpPr>
-        <p:spPr>
-          <a:xfrm>
-            <a:off x="4450080" y="1828800"/>
-            <a:ext cx="3048000" cy="1219200"/>
-          </a:xfrm>
-          <a:prstGeom prst="rect">
-            <a:avLst/>
-          </a:prstGeom>
-          <a:solidFill>
-            <a:srgbClr val="213E4B"/>
-          </a:solidFill>
-          <a:ln w="19050">
-            <a:solidFill>
-              <a:srgbClr val="B4C7D2"/>
-            </a:solidFill>
-          </a:ln>
-          <a:effectLst/>
-        </p:spPr>
-        <p:txBody>
-          <a:bodyPr rtlCol="0" anchor="ctr"/>
-          <a:lstStyle/>
-          <a:p>
-            <a:pPr algn="ctr"/>
-          </a:p>
-        </p:txBody>
-      </p:sp>
-      <p:sp>
-        <p:nvSpPr>
-          <p:cNvPr id="6" name="text5" descr="sci-ppt:C2-E28-005"/>
+              <a:t>Constant-property estimate: heat the liquid to T*, then add one</a:t>
+            </a:r>
+          </a:p>
+          <a:p>
+            <a:pPr algn="l">
+              <a:spcAft>
+                <a:spcPts val="0"/>
+              </a:spcAft>
+            </a:pPr>
+            <a:r>
+              <a:rPr sz="1150" b="0" i="0">
+                <a:solidFill>
+                  <a:srgbClr val="E7F0F3"/>
+                </a:solidFill>
+                <a:latin typeface="Arial"/>
+              </a:rPr>
+              <a:t>latent step.</a:t>
+            </a:r>
+          </a:p>
+        </p:txBody>
+      </p:sp>
+      <p:sp>
+        <p:nvSpPr>
+          <p:cNvPr id="16" name="C2-E28 text 14" descr="sci-ppt:o014"/>
           <p:cNvSpPr txBox="1"/>
           <p:nvPr/>
         </p:nvSpPr>
         <p:spPr>
           <a:xfrm>
-            <a:off x="4572000" y="1950720"/>
-            <a:ext cx="2865120" cy="340156"/>
+            <a:off x="6217920" y="960120"/>
+            <a:ext cx="5577840" cy="262636"/>
           </a:xfrm>
           <a:prstGeom prst="rect">
             <a:avLst/>
@@ -3258,7 +3614,7 @@
           <a:effectLst/>
         </p:spPr>
         <p:txBody>
-          <a:bodyPr wrap="none" lIns="27432" rIns="27432" tIns="18288" bIns="18288" anchor="ctr">
+          <a:bodyPr wrap="none" lIns="18288" rIns="18288" tIns="18288" bIns="18288" anchor="t">
             <a:spAutoFit/>
           </a:bodyPr>
           <a:lstStyle/>
@@ -3269,37 +3625,81 @@
               </a:spcAft>
             </a:pPr>
             <a:r>
-              <a:rPr sz="1728" b="0" i="0">
+              <a:rPr sz="1400" b="1" i="0">
+                <a:solidFill>
+                  <a:srgbClr val="8EDBD4"/>
+                </a:solidFill>
+                <a:latin typeface="Arial"/>
+              </a:rPr>
+              <a:t>Energy to prepare the PFC (nJ)</a:t>
+            </a:r>
+          </a:p>
+        </p:txBody>
+      </p:sp>
+      <p:sp>
+        <p:nvSpPr>
+          <p:cNvPr id="17" name="C2-E28 text 15" descr="sci-ppt:o015"/>
+          <p:cNvSpPr txBox="1"/>
+          <p:nvPr/>
+        </p:nvSpPr>
+        <p:spPr>
+          <a:xfrm>
+            <a:off x="6217920" y="1572768"/>
+            <a:ext cx="2286000" cy="231648"/>
+          </a:xfrm>
+          <a:prstGeom prst="rect">
+            <a:avLst/>
+          </a:prstGeom>
+          <a:noFill/>
+          <a:effectLst/>
+        </p:spPr>
+        <p:txBody>
+          <a:bodyPr wrap="none" lIns="18288" rIns="18288" tIns="18288" bIns="18288" anchor="t">
+            <a:spAutoFit/>
+          </a:bodyPr>
+          <a:lstStyle/>
+          <a:p>
+            <a:pPr algn="l">
+              <a:spcAft>
+                <a:spcPts val="0"/>
+              </a:spcAft>
+            </a:pPr>
+            <a:r>
+              <a:rPr sz="1200" b="0" i="0">
                 <a:solidFill>
                   <a:srgbClr val="E7F0F3"/>
                 </a:solidFill>
                 <a:latin typeface="Arial"/>
               </a:rPr>
-              <a:t>Latent conversion</a:t>
-            </a:r>
-          </a:p>
-        </p:txBody>
-      </p:sp>
-      <p:sp>
-        <p:nvSpPr>
-          <p:cNvPr id="7" name="rect6" descr="sci-ppt:C2-E28-006"/>
+              <a:t>sensible  m cₚ (T* − T₀)</a:t>
+            </a:r>
+          </a:p>
+        </p:txBody>
+      </p:sp>
+      <p:sp>
+        <p:nvSpPr>
+          <p:cNvPr id="18" name="C2-E28 rect 16" descr="sci-ppt:o016"/>
           <p:cNvSpPr/>
           <p:nvPr/>
         </p:nvSpPr>
         <p:spPr>
           <a:xfrm>
-            <a:off x="7985759" y="1828800"/>
-            <a:ext cx="3048000" cy="1219200"/>
+            <a:off x="8595360" y="1554480"/>
+            <a:ext cx="292312" cy="457200"/>
           </a:xfrm>
           <a:prstGeom prst="rect">
             <a:avLst/>
           </a:prstGeom>
           <a:solidFill>
-            <a:srgbClr val="213E4B"/>
+            <a:srgbClr val="7FC8F8">
+              <a:alpha val="85000"/>
+            </a:srgbClr>
           </a:solidFill>
-          <a:ln w="19050">
+          <a:ln w="12700">
             <a:solidFill>
-              <a:srgbClr val="B4C7D2"/>
+              <a:srgbClr val="7FC8F8">
+                <a:alpha val="85000"/>
+              </a:srgbClr>
             </a:solidFill>
           </a:ln>
           <a:effectLst/>
@@ -3314,14 +3714,14 @@
       </p:sp>
       <p:sp>
         <p:nvSpPr>
-          <p:cNvPr id="8" name="text7" descr="sci-ppt:C2-E28-007"/>
+          <p:cNvPr id="19" name="C2-E28 text 17" descr="sci-ppt:o017"/>
           <p:cNvSpPr txBox="1"/>
           <p:nvPr/>
         </p:nvSpPr>
         <p:spPr>
           <a:xfrm>
-            <a:off x="8107680" y="1950720"/>
-            <a:ext cx="2865120" cy="340156"/>
+            <a:off x="8960824" y="1600200"/>
+            <a:ext cx="1371600" cy="231648"/>
           </a:xfrm>
           <a:prstGeom prst="rect">
             <a:avLst/>
@@ -3330,7 +3730,7 @@
           <a:effectLst/>
         </p:spPr>
         <p:txBody>
-          <a:bodyPr wrap="none" lIns="27432" rIns="27432" tIns="18288" bIns="18288" anchor="ctr">
+          <a:bodyPr wrap="none" lIns="18288" rIns="18288" tIns="18288" bIns="18288" anchor="t">
             <a:spAutoFit/>
           </a:bodyPr>
           <a:lstStyle/>
@@ -3341,27 +3741,27 @@
               </a:spcAft>
             </a:pPr>
             <a:r>
-              <a:rPr sz="1728" b="0" i="0">
+              <a:rPr sz="1200" b="1" i="0">
                 <a:solidFill>
                   <a:srgbClr val="E7F0F3"/>
                 </a:solidFill>
                 <a:latin typeface="Arial"/>
               </a:rPr>
-              <a:t>Declared preparation</a:t>
-            </a:r>
-          </a:p>
-        </p:txBody>
-      </p:sp>
-      <p:sp>
-        <p:nvSpPr>
-          <p:cNvPr id="9" name="text8" descr="sci-ppt:C2-E28-008"/>
+              <a:t>16.75 nJ</a:t>
+            </a:r>
+          </a:p>
+        </p:txBody>
+      </p:sp>
+      <p:sp>
+        <p:nvSpPr>
+          <p:cNvPr id="20" name="C2-E28 text 18" descr="sci-ppt:o018"/>
           <p:cNvSpPr txBox="1"/>
           <p:nvPr/>
         </p:nvSpPr>
         <p:spPr>
           <a:xfrm>
-            <a:off x="4023360" y="2255520"/>
-            <a:ext cx="487680" cy="453542"/>
+            <a:off x="6217920" y="2304288"/>
+            <a:ext cx="2286000" cy="231648"/>
           </a:xfrm>
           <a:prstGeom prst="rect">
             <a:avLst/>
@@ -3370,7 +3770,7 @@
           <a:effectLst/>
         </p:spPr>
         <p:txBody>
-          <a:bodyPr wrap="none" lIns="27432" rIns="27432" tIns="18288" bIns="18288" anchor="ctr">
+          <a:bodyPr wrap="none" lIns="18288" rIns="18288" tIns="18288" bIns="18288" anchor="t">
             <a:spAutoFit/>
           </a:bodyPr>
           <a:lstStyle/>
@@ -3381,27 +3781,63 @@
               </a:spcAft>
             </a:pPr>
             <a:r>
-              <a:rPr sz="2304" b="0" i="0">
+              <a:rPr sz="1200" b="0" i="0">
                 <a:solidFill>
                   <a:srgbClr val="E7F0F3"/>
                 </a:solidFill>
                 <a:latin typeface="Arial"/>
               </a:rPr>
-              <a:t>+</a:t>
-            </a:r>
-          </a:p>
-        </p:txBody>
-      </p:sp>
-      <p:sp>
-        <p:nvSpPr>
-          <p:cNvPr id="10" name="text9" descr="sci-ppt:C2-E28-009"/>
+              <a:t>latent  m Lᵥ</a:t>
+            </a:r>
+          </a:p>
+        </p:txBody>
+      </p:sp>
+      <p:sp>
+        <p:nvSpPr>
+          <p:cNvPr id="21" name="C2-E28 rect 19" descr="sci-ppt:o019"/>
+          <p:cNvSpPr/>
+          <p:nvPr/>
+        </p:nvSpPr>
+        <p:spPr>
+          <a:xfrm>
+            <a:off x="8595360" y="2286000"/>
+            <a:ext cx="1415378" cy="457200"/>
+          </a:xfrm>
+          <a:prstGeom prst="rect">
+            <a:avLst/>
+          </a:prstGeom>
+          <a:solidFill>
+            <a:srgbClr val="F28BA0">
+              <a:alpha val="85000"/>
+            </a:srgbClr>
+          </a:solidFill>
+          <a:ln w="12700">
+            <a:solidFill>
+              <a:srgbClr val="F28BA0">
+                <a:alpha val="85000"/>
+              </a:srgbClr>
+            </a:solidFill>
+          </a:ln>
+          <a:effectLst/>
+        </p:spPr>
+        <p:txBody>
+          <a:bodyPr rtlCol="0" anchor="ctr"/>
+          <a:lstStyle/>
+          <a:p>
+            <a:pPr algn="ctr"/>
+          </a:p>
+        </p:txBody>
+      </p:sp>
+      <p:sp>
+        <p:nvSpPr>
+          <p:cNvPr id="22" name="C2-E28 text 20" descr="sci-ppt:o020"/>
           <p:cNvSpPr txBox="1"/>
           <p:nvPr/>
         </p:nvSpPr>
         <p:spPr>
           <a:xfrm>
-            <a:off x="7559040" y="2255520"/>
-            <a:ext cx="487680" cy="453542"/>
+            <a:off x="10083890" y="2331720"/>
+            <a:ext cx="1371600" cy="231648"/>
           </a:xfrm>
           <a:prstGeom prst="rect">
             <a:avLst/>
@@ -3410,7 +3846,7 @@
           <a:effectLst/>
         </p:spPr>
         <p:txBody>
-          <a:bodyPr wrap="none" lIns="27432" rIns="27432" tIns="18288" bIns="18288" anchor="ctr">
+          <a:bodyPr wrap="none" lIns="18288" rIns="18288" tIns="18288" bIns="18288" anchor="t">
             <a:spAutoFit/>
           </a:bodyPr>
           <a:lstStyle/>
@@ -3421,27 +3857,27 @@
               </a:spcAft>
             </a:pPr>
             <a:r>
-              <a:rPr sz="2304" b="0" i="0">
+              <a:rPr sz="1200" b="1" i="0">
                 <a:solidFill>
                   <a:srgbClr val="E7F0F3"/>
                 </a:solidFill>
                 <a:latin typeface="Arial"/>
               </a:rPr>
-              <a:t>=</a:t>
-            </a:r>
-          </a:p>
-        </p:txBody>
-      </p:sp>
-      <p:sp>
-        <p:nvSpPr>
-          <p:cNvPr id="11" name="text10" descr="sci-ppt:C2-E28-010"/>
+              <a:t>81.08 nJ</a:t>
+            </a:r>
+          </a:p>
+        </p:txBody>
+      </p:sp>
+      <p:sp>
+        <p:nvSpPr>
+          <p:cNvPr id="23" name="C2-E28 text 21" descr="sci-ppt:o021"/>
           <p:cNvSpPr txBox="1"/>
           <p:nvPr/>
         </p:nvSpPr>
         <p:spPr>
           <a:xfrm>
-            <a:off x="1219200" y="3840480"/>
-            <a:ext cx="10363200" cy="340156"/>
+            <a:off x="6217920" y="3035808"/>
+            <a:ext cx="2286000" cy="231648"/>
           </a:xfrm>
           <a:prstGeom prst="rect">
             <a:avLst/>
@@ -3450,7 +3886,7 @@
           <a:effectLst/>
         </p:spPr>
         <p:txBody>
-          <a:bodyPr wrap="none" lIns="27432" rIns="27432" tIns="18288" bIns="18288" anchor="ctr">
+          <a:bodyPr wrap="none" lIns="18288" rIns="18288" tIns="18288" bIns="18288" anchor="t">
             <a:spAutoFit/>
           </a:bodyPr>
           <a:lstStyle/>
@@ -3461,27 +3897,63 @@
               </a:spcAft>
             </a:pPr>
             <a:r>
-              <a:rPr sz="1728" b="0" i="0">
+              <a:rPr sz="1200" b="0" i="0">
                 <a:solidFill>
                   <a:srgbClr val="E7F0F3"/>
                 </a:solidFill>
                 <a:latin typeface="Arial"/>
               </a:rPr>
-              <a:t>Path estimate: retain separate loss and mechanical-work budgets.</a:t>
-            </a:r>
-          </a:p>
-        </p:txBody>
-      </p:sp>
-      <p:sp>
-        <p:nvSpPr>
-          <p:cNvPr id="12" name="text11" descr="sci-ppt:C2-E28-011"/>
+              <a:t>total  Qₚᵣₑₚ</a:t>
+            </a:r>
+          </a:p>
+        </p:txBody>
+      </p:sp>
+      <p:sp>
+        <p:nvSpPr>
+          <p:cNvPr id="24" name="C2-E28 rect 22" descr="sci-ppt:o022"/>
+          <p:cNvSpPr/>
+          <p:nvPr/>
+        </p:nvSpPr>
+        <p:spPr>
+          <a:xfrm>
+            <a:off x="8595360" y="3017520"/>
+            <a:ext cx="1707691" cy="457200"/>
+          </a:xfrm>
+          <a:prstGeom prst="rect">
+            <a:avLst/>
+          </a:prstGeom>
+          <a:solidFill>
+            <a:srgbClr val="8EDBD4">
+              <a:alpha val="85000"/>
+            </a:srgbClr>
+          </a:solidFill>
+          <a:ln w="12700">
+            <a:solidFill>
+              <a:srgbClr val="8EDBD4">
+                <a:alpha val="85000"/>
+              </a:srgbClr>
+            </a:solidFill>
+          </a:ln>
+          <a:effectLst/>
+        </p:spPr>
+        <p:txBody>
+          <a:bodyPr rtlCol="0" anchor="ctr"/>
+          <a:lstStyle/>
+          <a:p>
+            <a:pPr algn="ctr"/>
+          </a:p>
+        </p:txBody>
+      </p:sp>
+      <p:sp>
+        <p:nvSpPr>
+          <p:cNvPr id="25" name="C2-E28 text 23" descr="sci-ppt:o023"/>
           <p:cNvSpPr txBox="1"/>
           <p:nvPr/>
         </p:nvSpPr>
         <p:spPr>
           <a:xfrm>
-            <a:off x="365760" y="4974336"/>
-            <a:ext cx="5547360" cy="321259"/>
+            <a:off x="10376203" y="3063239"/>
+            <a:ext cx="1371600" cy="231648"/>
           </a:xfrm>
           <a:prstGeom prst="rect">
             <a:avLst/>
@@ -3490,7 +3962,7 @@
           <a:effectLst/>
         </p:spPr>
         <p:txBody>
-          <a:bodyPr wrap="none" lIns="27432" rIns="27432" tIns="18288" bIns="18288" anchor="ctr">
+          <a:bodyPr wrap="none" lIns="18288" rIns="18288" tIns="18288" bIns="18288" anchor="t">
             <a:spAutoFit/>
           </a:bodyPr>
           <a:lstStyle/>
@@ -3501,27 +3973,27 @@
               </a:spcAft>
             </a:pPr>
             <a:r>
-              <a:rPr sz="1632" b="0" i="0">
+              <a:rPr sz="1200" b="1" i="0">
                 <a:solidFill>
                   <a:srgbClr val="E7F0F3"/>
                 </a:solidFill>
                 <a:latin typeface="Arial"/>
               </a:rPr>
-              <a:t>m_PFC,0: finite core mass</a:t>
-            </a:r>
-          </a:p>
-        </p:txBody>
-      </p:sp>
-      <p:sp>
-        <p:nvSpPr>
-          <p:cNvPr id="13" name="text12" descr="sci-ppt:C2-E28-012"/>
+              <a:t>97.82 nJ</a:t>
+            </a:r>
+          </a:p>
+        </p:txBody>
+      </p:sp>
+      <p:sp>
+        <p:nvSpPr>
+          <p:cNvPr id="26" name="C2-E28 text 24" descr="sci-ppt:o024"/>
           <p:cNvSpPr txBox="1"/>
           <p:nvPr/>
         </p:nvSpPr>
         <p:spPr>
           <a:xfrm>
-            <a:off x="365760" y="5266944"/>
-            <a:ext cx="5547360" cy="321259"/>
+            <a:off x="6217920" y="3749039"/>
+            <a:ext cx="5577840" cy="262636"/>
           </a:xfrm>
           <a:prstGeom prst="rect">
             <a:avLst/>
@@ -3530,7 +4002,7 @@
           <a:effectLst/>
         </p:spPr>
         <p:txBody>
-          <a:bodyPr wrap="none" lIns="27432" rIns="27432" tIns="18288" bIns="18288" anchor="ctr">
+          <a:bodyPr wrap="none" lIns="18288" rIns="18288" tIns="18288" bIns="18288" anchor="t">
             <a:spAutoFit/>
           </a:bodyPr>
           <a:lstStyle/>
@@ -3541,27 +4013,83 @@
               </a:spcAft>
             </a:pPr>
             <a:r>
-              <a:rPr sz="1632" b="0" i="0">
+              <a:rPr sz="1400" b="1" i="0">
+                <a:solidFill>
+                  <a:srgbClr val="F2B880"/>
+                </a:solidFill>
+                <a:latin typeface="Arial"/>
+              </a:rPr>
+              <a:t>16.745 + 81.079 = 97.824 nJ</a:t>
+            </a:r>
+          </a:p>
+        </p:txBody>
+      </p:sp>
+      <p:sp>
+        <p:nvSpPr>
+          <p:cNvPr id="27" name="C2-E28 text 25" descr="sci-ppt:o025"/>
+          <p:cNvSpPr txBox="1"/>
+          <p:nvPr/>
+        </p:nvSpPr>
+        <p:spPr>
+          <a:xfrm>
+            <a:off x="6217920" y="4251960"/>
+            <a:ext cx="5577840" cy="433070"/>
+          </a:xfrm>
+          <a:prstGeom prst="rect">
+            <a:avLst/>
+          </a:prstGeom>
+          <a:noFill/>
+          <a:effectLst/>
+        </p:spPr>
+        <p:txBody>
+          <a:bodyPr wrap="none" lIns="18288" rIns="18288" tIns="18288" bIns="18288" anchor="t">
+            <a:spAutoFit/>
+          </a:bodyPr>
+          <a:lstStyle/>
+          <a:p>
+            <a:pPr algn="l">
+              <a:spcAft>
+                <a:spcPts val="0"/>
+              </a:spcAft>
+            </a:pPr>
+            <a:r>
+              <a:rPr sz="1250" b="0" i="0">
                 <a:solidFill>
                   <a:srgbClr val="E7F0F3"/>
                 </a:solidFill>
                 <a:latin typeface="Arial"/>
               </a:rPr>
-              <a:t>c_p,d = 654 J/(kg K)</a:t>
-            </a:r>
-          </a:p>
-        </p:txBody>
-      </p:sp>
-      <p:sp>
-        <p:nvSpPr>
-          <p:cNvPr id="14" name="text13" descr="sci-ppt:C2-E28-013"/>
+              <a:t>Latent heat is 83 % of this estimate, so evaporating the droplet</a:t>
+            </a:r>
+          </a:p>
+          <a:p>
+            <a:pPr algn="l">
+              <a:spcAft>
+                <a:spcPts val="0"/>
+              </a:spcAft>
+            </a:pPr>
+            <a:r>
+              <a:rPr sz="1250" b="0" i="0">
+                <a:solidFill>
+                  <a:srgbClr val="E7F0F3"/>
+                </a:solidFill>
+                <a:latin typeface="Arial"/>
+              </a:rPr>
+              <a:t>costs far more than warming it.</a:t>
+            </a:r>
+          </a:p>
+        </p:txBody>
+      </p:sp>
+      <p:sp>
+        <p:nvSpPr>
+          <p:cNvPr id="28" name="C2-E28 text 26" descr="sci-ppt:o026"/>
           <p:cNvSpPr txBox="1"/>
           <p:nvPr/>
         </p:nvSpPr>
         <p:spPr>
           <a:xfrm>
-            <a:off x="365760" y="5559552"/>
-            <a:ext cx="5547360" cy="321259"/>
+            <a:off x="914400" y="5943600"/>
+            <a:ext cx="10972800" cy="223900"/>
           </a:xfrm>
           <a:prstGeom prst="rect">
             <a:avLst/>
@@ -3570,7 +4098,7 @@
           <a:effectLst/>
         </p:spPr>
         <p:txBody>
-          <a:bodyPr wrap="none" lIns="27432" rIns="27432" tIns="18288" bIns="18288" anchor="ctr">
+          <a:bodyPr wrap="none" lIns="18288" rIns="18288" tIns="18288" bIns="18288" anchor="t">
             <a:spAutoFit/>
           </a:bodyPr>
           <a:lstStyle/>
@@ -3581,27 +4109,27 @@
               </a:spcAft>
             </a:pPr>
             <a:r>
-              <a:rPr sz="1632" b="0" i="0">
+              <a:rPr sz="1150" b="0" i="0">
                 <a:solidFill>
-                  <a:srgbClr val="E7F0F3"/>
+                  <a:srgbClr val="B4C7D2"/>
                 </a:solidFill>
                 <a:latin typeface="Arial"/>
               </a:rPr>
-              <a:t>Q_sens = 16.7450 nJ</a:t>
-            </a:r>
-          </a:p>
-        </p:txBody>
-      </p:sp>
-      <p:sp>
-        <p:nvSpPr>
-          <p:cNvPr id="15" name="text14" descr="sci-ppt:C2-E28-014"/>
+              <a:t>Inputs: m = 0.8535 ng, cₚ = 654 J/(kg K), Lᵥ = 95 kJ/kg, T₀ = 293 K, T* = 323 K (declared, constant-property).</a:t>
+            </a:r>
+          </a:p>
+        </p:txBody>
+      </p:sp>
+      <p:sp>
+        <p:nvSpPr>
+          <p:cNvPr id="29" name="C2-E28 text 27" descr="sci-ppt:o027"/>
           <p:cNvSpPr txBox="1"/>
           <p:nvPr/>
         </p:nvSpPr>
         <p:spPr>
           <a:xfrm>
-            <a:off x="365760" y="5852160"/>
-            <a:ext cx="5547360" cy="321259"/>
+            <a:off x="320040" y="6510528"/>
+            <a:ext cx="11521440" cy="200660"/>
           </a:xfrm>
           <a:prstGeom prst="rect">
             <a:avLst/>
@@ -3610,7 +4138,7 @@
           <a:effectLst/>
         </p:spPr>
         <p:txBody>
-          <a:bodyPr wrap="none" lIns="27432" rIns="27432" tIns="18288" bIns="18288" anchor="ctr">
+          <a:bodyPr wrap="none" lIns="18288" rIns="18288" tIns="18288" bIns="18288" anchor="t">
             <a:spAutoFit/>
           </a:bodyPr>
           <a:lstStyle/>
@@ -3621,213 +4149,13 @@
               </a:spcAft>
             </a:pPr>
             <a:r>
-              <a:rPr sz="1632" b="0" i="0">
-                <a:solidFill>
-                  <a:srgbClr val="E7F0F3"/>
-                </a:solidFill>
-                <a:latin typeface="Arial"/>
-              </a:rPr>
-              <a:t>Q_prep = 97.8243 nJ</a:t>
-            </a:r>
-          </a:p>
-        </p:txBody>
-      </p:sp>
-      <p:sp>
-        <p:nvSpPr>
-          <p:cNvPr id="16" name="text15" descr="sci-ppt:C2-E28-015"/>
-          <p:cNvSpPr txBox="1"/>
-          <p:nvPr/>
-        </p:nvSpPr>
-        <p:spPr>
-          <a:xfrm>
-            <a:off x="6156960" y="4974336"/>
-            <a:ext cx="5547360" cy="321259"/>
-          </a:xfrm>
-          <a:prstGeom prst="rect">
-            <a:avLst/>
-          </a:prstGeom>
-          <a:noFill/>
-          <a:effectLst/>
-        </p:spPr>
-        <p:txBody>
-          <a:bodyPr wrap="none" lIns="27432" rIns="27432" tIns="18288" bIns="18288" anchor="ctr">
-            <a:spAutoFit/>
-          </a:bodyPr>
-          <a:lstStyle/>
-          <a:p>
-            <a:pPr algn="l">
-              <a:spcAft>
-                <a:spcPts val="0"/>
-              </a:spcAft>
-            </a:pPr>
-            <a:r>
-              <a:rPr sz="1632" b="0" i="0">
-                <a:solidFill>
-                  <a:srgbClr val="E7F0F3"/>
-                </a:solidFill>
-                <a:latin typeface="Arial"/>
-              </a:rPr>
-              <a:t>T₀ = 293 K → T_* = 323 K</a:t>
-            </a:r>
-          </a:p>
-        </p:txBody>
-      </p:sp>
-      <p:sp>
-        <p:nvSpPr>
-          <p:cNvPr id="17" name="text16" descr="sci-ppt:C2-E28-016"/>
-          <p:cNvSpPr txBox="1"/>
-          <p:nvPr/>
-        </p:nvSpPr>
-        <p:spPr>
-          <a:xfrm>
-            <a:off x="6156960" y="5266944"/>
-            <a:ext cx="5547360" cy="321259"/>
-          </a:xfrm>
-          <a:prstGeom prst="rect">
-            <a:avLst/>
-          </a:prstGeom>
-          <a:noFill/>
-          <a:effectLst/>
-        </p:spPr>
-        <p:txBody>
-          <a:bodyPr wrap="none" lIns="27432" rIns="27432" tIns="18288" bIns="18288" anchor="ctr">
-            <a:spAutoFit/>
-          </a:bodyPr>
-          <a:lstStyle/>
-          <a:p>
-            <a:pPr algn="l">
-              <a:spcAft>
-                <a:spcPts val="0"/>
-              </a:spcAft>
-            </a:pPr>
-            <a:r>
-              <a:rPr sz="1632" b="0" i="0">
-                <a:solidFill>
-                  <a:srgbClr val="E7F0F3"/>
-                </a:solidFill>
-                <a:latin typeface="Arial"/>
-              </a:rPr>
-              <a:t>L_v = 95 kJ/kg</a:t>
-            </a:r>
-          </a:p>
-        </p:txBody>
-      </p:sp>
-      <p:sp>
-        <p:nvSpPr>
-          <p:cNvPr id="18" name="text17" descr="sci-ppt:C2-E28-017"/>
-          <p:cNvSpPr txBox="1"/>
-          <p:nvPr/>
-        </p:nvSpPr>
-        <p:spPr>
-          <a:xfrm>
-            <a:off x="6156960" y="5559552"/>
-            <a:ext cx="5547360" cy="321259"/>
-          </a:xfrm>
-          <a:prstGeom prst="rect">
-            <a:avLst/>
-          </a:prstGeom>
-          <a:noFill/>
-          <a:effectLst/>
-        </p:spPr>
-        <p:txBody>
-          <a:bodyPr wrap="none" lIns="27432" rIns="27432" tIns="18288" bIns="18288" anchor="ctr">
-            <a:spAutoFit/>
-          </a:bodyPr>
-          <a:lstStyle/>
-          <a:p>
-            <a:pPr algn="l">
-              <a:spcAft>
-                <a:spcPts val="0"/>
-              </a:spcAft>
-            </a:pPr>
-            <a:r>
-              <a:rPr sz="1632" b="0" i="0">
-                <a:solidFill>
-                  <a:srgbClr val="E7F0F3"/>
-                </a:solidFill>
-                <a:latin typeface="Arial"/>
-              </a:rPr>
-              <a:t>Q_lat = 81.0793 nJ</a:t>
-            </a:r>
-          </a:p>
-        </p:txBody>
-      </p:sp>
-      <p:sp>
-        <p:nvSpPr>
-          <p:cNvPr id="19" name="text18" descr="sci-ppt:C2-E28-018"/>
-          <p:cNvSpPr txBox="1"/>
-          <p:nvPr/>
-        </p:nvSpPr>
-        <p:spPr>
-          <a:xfrm>
-            <a:off x="365760" y="6339840"/>
-            <a:ext cx="11277600" cy="302361"/>
-          </a:xfrm>
-          <a:prstGeom prst="rect">
-            <a:avLst/>
-          </a:prstGeom>
-          <a:noFill/>
-          <a:effectLst/>
-        </p:spPr>
-        <p:txBody>
-          <a:bodyPr wrap="none" lIns="27432" rIns="27432" tIns="18288" bIns="18288" anchor="ctr">
-            <a:spAutoFit/>
-          </a:bodyPr>
-          <a:lstStyle/>
-          <a:p>
-            <a:pPr algn="l">
-              <a:spcAft>
-                <a:spcPts val="0"/>
-              </a:spcAft>
-            </a:pPr>
-            <a:r>
-              <a:rPr sz="1536" b="0" i="0">
+              <a:rPr sz="1000" b="0" i="0">
                 <a:solidFill>
                   <a:srgbClr val="B4C7D2"/>
                 </a:solidFill>
                 <a:latin typeface="Arial"/>
               </a:rPr>
-              <a:t>Sensible plus latent preparation energy</a:t>
-            </a:r>
-          </a:p>
-        </p:txBody>
-      </p:sp>
-      <p:sp>
-        <p:nvSpPr>
-          <p:cNvPr id="20" name="text19" descr="sci-ppt:C2-E28-019"/>
-          <p:cNvSpPr txBox="1"/>
-          <p:nvPr/>
-        </p:nvSpPr>
-        <p:spPr>
-          <a:xfrm>
-            <a:off x="365760" y="6632448"/>
-            <a:ext cx="11277600" cy="302361"/>
-          </a:xfrm>
-          <a:prstGeom prst="rect">
-            <a:avLst/>
-          </a:prstGeom>
-          <a:noFill/>
-          <a:effectLst/>
-        </p:spPr>
-        <p:txBody>
-          <a:bodyPr wrap="none" lIns="27432" rIns="27432" tIns="18288" bIns="18288" anchor="ctr">
-            <a:spAutoFit/>
-          </a:bodyPr>
-          <a:lstStyle/>
-          <a:p>
-            <a:pPr algn="l">
-              <a:spcAft>
-                <a:spcPts val="0"/>
-              </a:spcAft>
-            </a:pPr>
-            <a:r>
-              <a:rPr sz="1536" b="0" i="0">
-                <a:solidFill>
-                  <a:srgbClr val="B4C7D2"/>
-                </a:solidFill>
-                <a:latin typeface="Arial"/>
-              </a:rPr>
-              <a:t>Carrier losses and mechanical work require a broader energy ledger</a:t>
+              <a:t>Preparation-path estimate of Eq. C2-E28.</a:t>
             </a:r>
           </a:p>
         </p:txBody>
